--- a/dist/초3/영어/소리와문자/초3_영어_소리와문자_03_소문자와첫소리_학생용.pptx
+++ b/dist/초3/영어/소리와문자/초3_영어_소리와문자_03_소문자와첫소리_학생용.pptx
@@ -123,13 +123,13 @@
   <p:extLst>
     <p:ext uri="{521415D9-36F7-43E2-AB2F-B90AF26B5E84}">
       <p14:sectionLst xmlns:p14="http://schemas.microsoft.com/office/powerpoint/2010/main">
-        <p14:section name="도입" id="{6342372e-6ebe-d99e-c0ea-0e2e5d499a2d}">
+        <p14:section name="도입" id="{4917d1de-1a2c-f4b5-f7aa-2e3a6e28d44d}">
           <p14:sldIdLst>
             <p14:sldId id="256"/>
             <p14:sldId id="257"/>
           </p14:sldIdLst>
         </p14:section>
-        <p14:section name="개념" id="{d28063c7-1b06-5dea-6181-2ebcd32e9296}">
+        <p14:section name="개념" id="{81c54008-ca02-21ee-1c9e-52e479d3cc4b}">
           <p14:sldIdLst>
             <p14:sldId id="258"/>
             <p14:sldId id="259"/>
@@ -141,37 +141,37 @@
             <p14:sldId id="267"/>
           </p14:sldIdLst>
         </p14:section>
-        <p14:section name="연습" id="{5e59af6d-48c5-0cf2-b659-fcd5ebf7481f}">
+        <p14:section name="연습" id="{9079e49c-8b08-47e8-30eb-d04f275f4c72}">
           <p14:sldIdLst>
             <p14:sldId id="263"/>
             <p14:sldId id="266"/>
             <p14:sldId id="268"/>
           </p14:sldIdLst>
         </p14:section>
-        <p14:section name="개념" id="{e1b77114-0a8c-cb25-323b-70dc25bc4bfb}">
+        <p14:section name="개념" id="{d86d6686-a483-68f5-5ddf-786c70c514cf}">
           <p14:sldIdLst/>
         </p14:section>
-        <p14:section name="연습" id="{180224cc-c7db-5bec-a820-d101c5027824}">
+        <p14:section name="연습" id="{35a33470-b8e4-dc67-df8a-7c12c7976f48}">
           <p14:sldIdLst/>
         </p14:section>
-        <p14:section name="개념" id="{85179cf1-6128-ce8f-cddb-7f18343c3522}">
+        <p14:section name="개념" id="{72292ae3-ea80-7e6d-71af-a2b893a9c4b3}">
           <p14:sldIdLst/>
         </p14:section>
-        <p14:section name="연습" id="{b6d684b9-b165-c010-de4f-a5b39912c8c8}">
+        <p14:section name="연습" id="{0e43c01a-4cdb-6f57-3a20-3fa6b4b87d26}">
           <p14:sldIdLst/>
         </p14:section>
-        <p14:section name="확인" id="{fb54ed13-e3af-8a06-0d9f-43fb64c4f220}">
+        <p14:section name="확인" id="{c0ae32a9-c992-282a-4d80-417b57f58fd6}">
           <p14:sldIdLst>
             <p14:sldId id="269"/>
             <p14:sldId id="270"/>
           </p14:sldIdLst>
         </p14:section>
-        <p14:section name="정리" id="{e638482c-e9b2-cfd9-abf5-f4dbb50b8080}">
+        <p14:section name="정리" id="{a34db9f7-4150-bf15-95fc-dca9e4f1eba0}">
           <p14:sldIdLst>
             <p14:sldId id="271"/>
           </p14:sldIdLst>
         </p14:section>
-        <p14:section name="보충" id="{69c734f0-8df3-3f59-a850-20309948839f}">
+        <p14:section name="보충" id="{ab7dcadb-677f-683f-f106-770f2503f0d2}">
           <p14:sldIdLst>
             <p14:sldId id="272"/>
           </p14:sldIdLst>

--- a/dist/초3/영어/소리와문자/초3_영어_소리와문자_03_소문자와첫소리_학생용.pptx
+++ b/dist/초3/영어/소리와문자/초3_영어_소리와문자_03_소문자와첫소리_학생용.pptx
@@ -123,13 +123,13 @@
   <p:extLst>
     <p:ext uri="{521415D9-36F7-43E2-AB2F-B90AF26B5E84}">
       <p14:sectionLst xmlns:p14="http://schemas.microsoft.com/office/powerpoint/2010/main">
-        <p14:section name="도입" id="{4917d1de-1a2c-f4b5-f7aa-2e3a6e28d44d}">
+        <p14:section name="도입" id="{fc171172-893f-0f55-16a6-1213d7afcd50}">
           <p14:sldIdLst>
             <p14:sldId id="256"/>
             <p14:sldId id="257"/>
           </p14:sldIdLst>
         </p14:section>
-        <p14:section name="개념" id="{81c54008-ca02-21ee-1c9e-52e479d3cc4b}">
+        <p14:section name="개념" id="{2ff242a5-6f91-f425-376c-fd1f8244745b}">
           <p14:sldIdLst>
             <p14:sldId id="258"/>
             <p14:sldId id="259"/>
@@ -141,37 +141,37 @@
             <p14:sldId id="267"/>
           </p14:sldIdLst>
         </p14:section>
-        <p14:section name="연습" id="{9079e49c-8b08-47e8-30eb-d04f275f4c72}">
+        <p14:section name="연습" id="{dbba3f1a-0990-c696-eacb-7c3b08cfd5af}">
           <p14:sldIdLst>
             <p14:sldId id="263"/>
             <p14:sldId id="266"/>
             <p14:sldId id="268"/>
           </p14:sldIdLst>
         </p14:section>
-        <p14:section name="개념" id="{d86d6686-a483-68f5-5ddf-786c70c514cf}">
+        <p14:section name="개념" id="{3c87cd98-255d-49fa-55b3-f8635c51f293}">
           <p14:sldIdLst/>
         </p14:section>
-        <p14:section name="연습" id="{35a33470-b8e4-dc67-df8a-7c12c7976f48}">
+        <p14:section name="연습" id="{3e5213ba-cb7f-b531-3408-05a0f816d307}">
           <p14:sldIdLst/>
         </p14:section>
-        <p14:section name="개념" id="{72292ae3-ea80-7e6d-71af-a2b893a9c4b3}">
+        <p14:section name="개념" id="{85747277-2e37-4e58-9282-dba8377dab2a}">
           <p14:sldIdLst/>
         </p14:section>
-        <p14:section name="연습" id="{0e43c01a-4cdb-6f57-3a20-3fa6b4b87d26}">
+        <p14:section name="연습" id="{5ecd75e6-0ed1-2d23-9a1f-9d3eaba9501d}">
           <p14:sldIdLst/>
         </p14:section>
-        <p14:section name="확인" id="{c0ae32a9-c992-282a-4d80-417b57f58fd6}">
+        <p14:section name="확인" id="{7e759056-7f6f-8402-eb08-2802761e4065}">
           <p14:sldIdLst>
             <p14:sldId id="269"/>
             <p14:sldId id="270"/>
           </p14:sldIdLst>
         </p14:section>
-        <p14:section name="정리" id="{a34db9f7-4150-bf15-95fc-dca9e4f1eba0}">
+        <p14:section name="정리" id="{c48a562f-d9c3-8b8c-69d7-c99784e881b0}">
           <p14:sldIdLst>
             <p14:sldId id="271"/>
           </p14:sldIdLst>
         </p14:section>
-        <p14:section name="보충" id="{ab7dcadb-677f-683f-f106-770f2503f0d2}">
+        <p14:section name="보충" id="{46502c9f-6570-b89f-64b7-ff08c5be325b}">
           <p14:sldIdLst>
             <p14:sldId id="272"/>
           </p14:sldIdLst>
@@ -7803,7 +7803,7 @@
                 <a:ea typeface="맑은 고딕" pitchFamily="34" charset="-122"/>
                 <a:cs typeface="맑은 고딕" pitchFamily="34" charset="-120"/>
               </a:rPr>
-              <a:t>다음 시간: 인사하기</a:t>
+              <a:t>다음 시간: 자음 글자의 소리</a:t>
             </a:r>
             <a:endParaRPr lang="ko-KR" sz="2400" dirty="0"/>
           </a:p>

--- a/dist/초3/영어/소리와문자/초3_영어_소리와문자_03_소문자와첫소리_학생용.pptx
+++ b/dist/초3/영어/소리와문자/초3_영어_소리와문자_03_소문자와첫소리_학생용.pptx
@@ -123,13 +123,13 @@
   <p:extLst>
     <p:ext uri="{521415D9-36F7-43E2-AB2F-B90AF26B5E84}">
       <p14:sectionLst xmlns:p14="http://schemas.microsoft.com/office/powerpoint/2010/main">
-        <p14:section name="도입" id="{fc171172-893f-0f55-16a6-1213d7afcd50}">
+        <p14:section name="도입" id="{67b1710c-f10b-865d-9eb3-084134dcd8e4}">
           <p14:sldIdLst>
             <p14:sldId id="256"/>
             <p14:sldId id="257"/>
           </p14:sldIdLst>
         </p14:section>
-        <p14:section name="개념" id="{2ff242a5-6f91-f425-376c-fd1f8244745b}">
+        <p14:section name="개념" id="{7efdbe52-9684-4f34-4637-e4b26ce1bdb5}">
           <p14:sldIdLst>
             <p14:sldId id="258"/>
             <p14:sldId id="259"/>
@@ -141,37 +141,37 @@
             <p14:sldId id="267"/>
           </p14:sldIdLst>
         </p14:section>
-        <p14:section name="연습" id="{dbba3f1a-0990-c696-eacb-7c3b08cfd5af}">
+        <p14:section name="연습" id="{f18e9f2e-64cb-38ee-5b91-3bc41bb9bfc2}">
           <p14:sldIdLst>
             <p14:sldId id="263"/>
             <p14:sldId id="266"/>
             <p14:sldId id="268"/>
           </p14:sldIdLst>
         </p14:section>
-        <p14:section name="개념" id="{3c87cd98-255d-49fa-55b3-f8635c51f293}">
+        <p14:section name="개념" id="{e2cafb5b-8ced-1500-a4f0-84df1f202f3e}">
           <p14:sldIdLst/>
         </p14:section>
-        <p14:section name="연습" id="{3e5213ba-cb7f-b531-3408-05a0f816d307}">
+        <p14:section name="연습" id="{b66248cb-fe5a-6e04-9f5e-24dcd5d2db3a}">
           <p14:sldIdLst/>
         </p14:section>
-        <p14:section name="개념" id="{85747277-2e37-4e58-9282-dba8377dab2a}">
+        <p14:section name="개념" id="{fe518326-1d49-eba5-eb61-6aa99efd4fae}">
           <p14:sldIdLst/>
         </p14:section>
-        <p14:section name="연습" id="{5ecd75e6-0ed1-2d23-9a1f-9d3eaba9501d}">
+        <p14:section name="연습" id="{e7d0bffa-55af-4363-c7b9-f5e527e44543}">
           <p14:sldIdLst/>
         </p14:section>
-        <p14:section name="확인" id="{7e759056-7f6f-8402-eb08-2802761e4065}">
+        <p14:section name="확인" id="{0cb968ba-fc75-d86d-73f6-8ba7731a9238}">
           <p14:sldIdLst>
             <p14:sldId id="269"/>
             <p14:sldId id="270"/>
           </p14:sldIdLst>
         </p14:section>
-        <p14:section name="정리" id="{c48a562f-d9c3-8b8c-69d7-c99784e881b0}">
+        <p14:section name="정리" id="{df784cd3-faf8-4f69-9597-b0870297a225}">
           <p14:sldIdLst>
             <p14:sldId id="271"/>
           </p14:sldIdLst>
         </p14:section>
-        <p14:section name="보충" id="{46502c9f-6570-b89f-64b7-ff08c5be325b}">
+        <p14:section name="보충" id="{0d2b6929-553a-27d1-d44e-ed231d9a3899}">
           <p14:sldIdLst>
             <p14:sldId id="272"/>
           </p14:sldIdLst>
